--- a/Reporte 280726.pptx
+++ b/Reporte 280726.pptx
@@ -6420,39 +6420,7 @@
                 <a:latin typeface="Montserrat Black"/>
                 <a:sym typeface="Arial"/>
               </a:rPr>
-              <a:t>Elaborado</a:t>
-            </a:r>
-            <a:r>
-              <a:rPr kumimoji="0" lang="es-MX" sz="1600" b="0" i="0" u="none" strike="noStrike" kern="0" cap="none" spc="0" normalizeH="0" baseline="0" noProof="0">
-                <a:ln>
-                  <a:noFill/>
-                </a:ln>
-                <a:solidFill>
-                  <a:srgbClr val="D8AB72"/>
-                </a:solidFill>
-                <a:effectLst/>
-                <a:uLnTx/>
-                <a:uFillTx/>
-                <a:latin typeface="Montserrat Black"/>
-                <a:sym typeface="Arial"/>
-              </a:rPr>
-              <a:t>: 27 </a:t>
-            </a:r>
-            <a:r>
-              <a:rPr kumimoji="0" lang="es-MX" sz="1600" b="0" i="0" u="none" strike="noStrike" kern="0" cap="none" spc="0" normalizeH="0" baseline="0" noProof="0" dirty="0">
-                <a:ln>
-                  <a:noFill/>
-                </a:ln>
-                <a:solidFill>
-                  <a:srgbClr val="D8AB72"/>
-                </a:solidFill>
-                <a:effectLst/>
-                <a:uLnTx/>
-                <a:uFillTx/>
-                <a:latin typeface="Montserrat Black"/>
-                <a:sym typeface="Arial"/>
-              </a:rPr>
-              <a:t>de julio</a:t>
+              <a:t>Elaborado: 28 de julio</a:t>
             </a:r>
             <a:endParaRPr lang="es-MX" sz="1600" dirty="0">
               <a:solidFill>
@@ -7251,10 +7219,10 @@
       </p:sp>
       <p:pic>
         <p:nvPicPr>
-          <p:cNvPr id="3" name="Imagen 2">
+          <p:cNvPr id="4" name="Imagen 3">
             <a:extLst>
               <a:ext uri="{FF2B5EF4-FFF2-40B4-BE49-F238E27FC236}">
-                <a16:creationId xmlns:a16="http://schemas.microsoft.com/office/drawing/2014/main" id="{AA5D1D51-8D64-568A-F447-F4B724053321}"/>
+                <a16:creationId xmlns:a16="http://schemas.microsoft.com/office/drawing/2014/main" id="{8DF346C9-768F-E53B-3AA4-6A8596AF9C01}"/>
               </a:ext>
             </a:extLst>
           </p:cNvPr>
@@ -7271,8 +7239,8 @@
         </p:blipFill>
         <p:spPr>
           <a:xfrm>
-            <a:off x="0" y="934859"/>
-            <a:ext cx="9144000" cy="3416657"/>
+            <a:off x="0" y="946287"/>
+            <a:ext cx="9144000" cy="3393802"/>
           </a:xfrm>
           <a:prstGeom prst="rect">
             <a:avLst/>
@@ -7365,10 +7333,10 @@
       </p:sp>
       <p:pic>
         <p:nvPicPr>
-          <p:cNvPr id="4" name="Imagen 3">
+          <p:cNvPr id="3" name="Imagen 2">
             <a:extLst>
               <a:ext uri="{FF2B5EF4-FFF2-40B4-BE49-F238E27FC236}">
-                <a16:creationId xmlns:a16="http://schemas.microsoft.com/office/drawing/2014/main" id="{0F586774-10AC-8B29-E902-23F4782F3D96}"/>
+                <a16:creationId xmlns:a16="http://schemas.microsoft.com/office/drawing/2014/main" id="{142EA2B6-A5CF-C6BD-DFBA-540EC4E6F114}"/>
               </a:ext>
             </a:extLst>
           </p:cNvPr>
@@ -7385,8 +7353,8 @@
         </p:blipFill>
         <p:spPr>
           <a:xfrm>
-            <a:off x="0" y="1403070"/>
-            <a:ext cx="9144000" cy="2480235"/>
+            <a:off x="0" y="1406907"/>
+            <a:ext cx="9144000" cy="2472562"/>
           </a:xfrm>
           <a:prstGeom prst="rect">
             <a:avLst/>
@@ -7479,10 +7447,10 @@
       </p:sp>
       <p:pic>
         <p:nvPicPr>
-          <p:cNvPr id="3" name="Imagen 2">
+          <p:cNvPr id="2" name="Imagen 1">
             <a:extLst>
               <a:ext uri="{FF2B5EF4-FFF2-40B4-BE49-F238E27FC236}">
-                <a16:creationId xmlns:a16="http://schemas.microsoft.com/office/drawing/2014/main" id="{A041737B-6B5E-AE12-DBC6-1ECBB0E3D47D}"/>
+                <a16:creationId xmlns:a16="http://schemas.microsoft.com/office/drawing/2014/main" id="{A08E1D12-2874-23B8-209D-386BC4232234}"/>
               </a:ext>
             </a:extLst>
           </p:cNvPr>
@@ -7499,8 +7467,8 @@
         </p:blipFill>
         <p:spPr>
           <a:xfrm>
-            <a:off x="1106488" y="914940"/>
-            <a:ext cx="6858000" cy="3456495"/>
+            <a:off x="422370" y="570139"/>
+            <a:ext cx="8226235" cy="4146098"/>
           </a:xfrm>
           <a:prstGeom prst="rect">
             <a:avLst/>
@@ -7589,10 +7557,10 @@
       </p:sp>
       <p:pic>
         <p:nvPicPr>
-          <p:cNvPr id="3" name="Imagen 2">
+          <p:cNvPr id="4" name="Imagen 3">
             <a:extLst>
               <a:ext uri="{FF2B5EF4-FFF2-40B4-BE49-F238E27FC236}">
-                <a16:creationId xmlns:a16="http://schemas.microsoft.com/office/drawing/2014/main" id="{D02A6287-FA39-2DE5-164F-163BE0328F6B}"/>
+                <a16:creationId xmlns:a16="http://schemas.microsoft.com/office/drawing/2014/main" id="{78E5C624-56C5-4761-54D0-B5857944ABA1}"/>
               </a:ext>
             </a:extLst>
           </p:cNvPr>
@@ -7609,8 +7577,8 @@
         </p:blipFill>
         <p:spPr>
           <a:xfrm>
-            <a:off x="563007" y="685527"/>
-            <a:ext cx="7944959" cy="3915321"/>
+            <a:off x="575705" y="642668"/>
+            <a:ext cx="7992590" cy="3858163"/>
           </a:xfrm>
           <a:prstGeom prst="rect">
             <a:avLst/>
@@ -7703,10 +7671,10 @@
       </p:sp>
       <p:pic>
         <p:nvPicPr>
-          <p:cNvPr id="3" name="Imagen 2">
+          <p:cNvPr id="4" name="Imagen 3">
             <a:extLst>
               <a:ext uri="{FF2B5EF4-FFF2-40B4-BE49-F238E27FC236}">
-                <a16:creationId xmlns:a16="http://schemas.microsoft.com/office/drawing/2014/main" id="{246167E6-5F08-BD6C-A24D-DFBE5FBA958C}"/>
+                <a16:creationId xmlns:a16="http://schemas.microsoft.com/office/drawing/2014/main" id="{ACF62CAB-EC89-48B6-7CE3-9787A285B28D}"/>
               </a:ext>
             </a:extLst>
           </p:cNvPr>
@@ -7723,8 +7691,8 @@
         </p:blipFill>
         <p:spPr>
           <a:xfrm>
-            <a:off x="0" y="944734"/>
-            <a:ext cx="9144000" cy="3396907"/>
+            <a:off x="0" y="884082"/>
+            <a:ext cx="9144000" cy="3375335"/>
           </a:xfrm>
           <a:prstGeom prst="rect">
             <a:avLst/>
@@ -7817,10 +7785,10 @@
       </p:sp>
       <p:pic>
         <p:nvPicPr>
-          <p:cNvPr id="3" name="Imagen 2">
+          <p:cNvPr id="2" name="Imagen 1">
             <a:extLst>
               <a:ext uri="{FF2B5EF4-FFF2-40B4-BE49-F238E27FC236}">
-                <a16:creationId xmlns:a16="http://schemas.microsoft.com/office/drawing/2014/main" id="{541F3D17-1AE6-9A6B-7C81-883F59EA4F22}"/>
+                <a16:creationId xmlns:a16="http://schemas.microsoft.com/office/drawing/2014/main" id="{DCE74190-07F4-7CEF-C274-777023B71ED4}"/>
               </a:ext>
             </a:extLst>
           </p:cNvPr>
@@ -7837,8 +7805,8 @@
         </p:blipFill>
         <p:spPr>
           <a:xfrm>
-            <a:off x="1143000" y="914940"/>
-            <a:ext cx="6858000" cy="3456495"/>
+            <a:off x="607524" y="663458"/>
+            <a:ext cx="7855928" cy="3959460"/>
           </a:xfrm>
           <a:prstGeom prst="rect">
             <a:avLst/>
@@ -7931,10 +7899,10 @@
       </p:sp>
       <p:pic>
         <p:nvPicPr>
-          <p:cNvPr id="3" name="Imagen 2">
+          <p:cNvPr id="2" name="Imagen 1">
             <a:extLst>
               <a:ext uri="{FF2B5EF4-FFF2-40B4-BE49-F238E27FC236}">
-                <a16:creationId xmlns:a16="http://schemas.microsoft.com/office/drawing/2014/main" id="{363849C1-DE0E-5A2F-22E8-97D9F3786A03}"/>
+                <a16:creationId xmlns:a16="http://schemas.microsoft.com/office/drawing/2014/main" id="{7C16BC82-8CB8-5F57-1D57-DD39A834A4C8}"/>
               </a:ext>
             </a:extLst>
           </p:cNvPr>
@@ -7951,8 +7919,8 @@
         </p:blipFill>
         <p:spPr>
           <a:xfrm>
-            <a:off x="586095" y="652658"/>
-            <a:ext cx="7898785" cy="3981060"/>
+            <a:off x="1106488" y="914940"/>
+            <a:ext cx="6858000" cy="3456495"/>
           </a:xfrm>
           <a:prstGeom prst="rect">
             <a:avLst/>
@@ -8041,10 +8009,10 @@
       </p:sp>
       <p:pic>
         <p:nvPicPr>
-          <p:cNvPr id="3" name="Imagen 2">
+          <p:cNvPr id="4" name="Imagen 3">
             <a:extLst>
               <a:ext uri="{FF2B5EF4-FFF2-40B4-BE49-F238E27FC236}">
-                <a16:creationId xmlns:a16="http://schemas.microsoft.com/office/drawing/2014/main" id="{EC328E95-DAB1-E47B-B648-AA8D052F8CF5}"/>
+                <a16:creationId xmlns:a16="http://schemas.microsoft.com/office/drawing/2014/main" id="{24BA6BB2-8DFC-604F-D9C6-B16F8187931F}"/>
               </a:ext>
             </a:extLst>
           </p:cNvPr>
@@ -8061,8 +8029,8 @@
         </p:blipFill>
         <p:spPr>
           <a:xfrm>
-            <a:off x="448691" y="895106"/>
-            <a:ext cx="8173591" cy="3496163"/>
+            <a:off x="548718" y="642659"/>
+            <a:ext cx="7973538" cy="4001058"/>
           </a:xfrm>
           <a:prstGeom prst="rect">
             <a:avLst/>

--- a/Reporte 280726.pptx
+++ b/Reporte 280726.pptx
@@ -6543,10 +6543,10 @@
       </p:sp>
       <p:pic>
         <p:nvPicPr>
-          <p:cNvPr id="4" name="Imagen 3">
+          <p:cNvPr id="5" name="Imagen 4">
             <a:extLst>
               <a:ext uri="{FF2B5EF4-FFF2-40B4-BE49-F238E27FC236}">
-                <a16:creationId xmlns:a16="http://schemas.microsoft.com/office/drawing/2014/main" id="{3E064897-1B3E-40EA-97AB-875095B9B7A0}"/>
+                <a16:creationId xmlns:a16="http://schemas.microsoft.com/office/drawing/2014/main" id="{4BA09524-1B12-2E58-231D-653A7069DE12}"/>
               </a:ext>
             </a:extLst>
           </p:cNvPr>
@@ -6563,8 +6563,8 @@
         </p:blipFill>
         <p:spPr>
           <a:xfrm>
-            <a:off x="0" y="894996"/>
-            <a:ext cx="9144000" cy="3496384"/>
+            <a:off x="0" y="891725"/>
+            <a:ext cx="9144000" cy="3502925"/>
           </a:xfrm>
           <a:prstGeom prst="rect">
             <a:avLst/>
@@ -6641,10 +6641,10 @@
       </p:sp>
       <p:pic>
         <p:nvPicPr>
-          <p:cNvPr id="4" name="Imagen 3">
+          <p:cNvPr id="3" name="Imagen 2">
             <a:extLst>
               <a:ext uri="{FF2B5EF4-FFF2-40B4-BE49-F238E27FC236}">
-                <a16:creationId xmlns:a16="http://schemas.microsoft.com/office/drawing/2014/main" id="{4ABB8E6A-F54B-5A99-5E16-D50E76D7269A}"/>
+                <a16:creationId xmlns:a16="http://schemas.microsoft.com/office/drawing/2014/main" id="{F6BC4083-69E7-A2C6-0B36-D956A57A05D5}"/>
               </a:ext>
             </a:extLst>
           </p:cNvPr>
@@ -6661,8 +6661,8 @@
         </p:blipFill>
         <p:spPr>
           <a:xfrm>
-            <a:off x="0" y="1324928"/>
-            <a:ext cx="9144000" cy="2636520"/>
+            <a:off x="0" y="1249418"/>
+            <a:ext cx="9144000" cy="2644664"/>
           </a:xfrm>
           <a:prstGeom prst="rect">
             <a:avLst/>
@@ -6745,10 +6745,10 @@
       </p:sp>
       <p:pic>
         <p:nvPicPr>
-          <p:cNvPr id="4" name="Imagen 3">
+          <p:cNvPr id="3" name="Imagen 2">
             <a:extLst>
               <a:ext uri="{FF2B5EF4-FFF2-40B4-BE49-F238E27FC236}">
-                <a16:creationId xmlns:a16="http://schemas.microsoft.com/office/drawing/2014/main" id="{6E21EA75-856D-277B-1A9B-8BA334F0B9C4}"/>
+                <a16:creationId xmlns:a16="http://schemas.microsoft.com/office/drawing/2014/main" id="{EA9E5763-202A-E129-7739-8350AB4D6004}"/>
               </a:ext>
             </a:extLst>
           </p:cNvPr>
@@ -6765,8 +6765,8 @@
         </p:blipFill>
         <p:spPr>
           <a:xfrm>
-            <a:off x="0" y="1004437"/>
-            <a:ext cx="9144000" cy="3277501"/>
+            <a:off x="0" y="765749"/>
+            <a:ext cx="9144000" cy="3754877"/>
           </a:xfrm>
           <a:prstGeom prst="rect">
             <a:avLst/>
@@ -6843,10 +6843,10 @@
       </p:sp>
       <p:pic>
         <p:nvPicPr>
-          <p:cNvPr id="4" name="Imagen 3">
+          <p:cNvPr id="5" name="Imagen 4">
             <a:extLst>
               <a:ext uri="{FF2B5EF4-FFF2-40B4-BE49-F238E27FC236}">
-                <a16:creationId xmlns:a16="http://schemas.microsoft.com/office/drawing/2014/main" id="{47AC26AB-4849-FBE0-A3B4-D16F6A737174}"/>
+                <a16:creationId xmlns:a16="http://schemas.microsoft.com/office/drawing/2014/main" id="{397A2464-0738-6893-A810-DEBA536256A0}"/>
               </a:ext>
             </a:extLst>
           </p:cNvPr>
@@ -6863,8 +6863,8 @@
         </p:blipFill>
         <p:spPr>
           <a:xfrm>
-            <a:off x="0" y="1257657"/>
-            <a:ext cx="9144000" cy="2771062"/>
+            <a:off x="0" y="1230392"/>
+            <a:ext cx="9144000" cy="2825592"/>
           </a:xfrm>
           <a:prstGeom prst="rect">
             <a:avLst/>
@@ -6941,10 +6941,10 @@
       </p:sp>
       <p:pic>
         <p:nvPicPr>
-          <p:cNvPr id="4" name="Imagen 3">
+          <p:cNvPr id="3" name="Imagen 2">
             <a:extLst>
               <a:ext uri="{FF2B5EF4-FFF2-40B4-BE49-F238E27FC236}">
-                <a16:creationId xmlns:a16="http://schemas.microsoft.com/office/drawing/2014/main" id="{B25CC990-7072-8460-970B-D6E11D402120}"/>
+                <a16:creationId xmlns:a16="http://schemas.microsoft.com/office/drawing/2014/main" id="{BCDC3493-778B-B897-9A3C-FAC5F754C7C6}"/>
               </a:ext>
             </a:extLst>
           </p:cNvPr>
@@ -6961,8 +6961,8 @@
         </p:blipFill>
         <p:spPr>
           <a:xfrm>
-            <a:off x="0" y="707319"/>
-            <a:ext cx="9144000" cy="3871738"/>
+            <a:off x="0" y="665647"/>
+            <a:ext cx="9144000" cy="3898605"/>
           </a:xfrm>
           <a:prstGeom prst="rect">
             <a:avLst/>
@@ -7045,10 +7045,10 @@
       </p:sp>
       <p:pic>
         <p:nvPicPr>
-          <p:cNvPr id="3" name="Imagen 2">
+          <p:cNvPr id="4" name="Imagen 3">
             <a:extLst>
               <a:ext uri="{FF2B5EF4-FFF2-40B4-BE49-F238E27FC236}">
-                <a16:creationId xmlns:a16="http://schemas.microsoft.com/office/drawing/2014/main" id="{2CCC40BF-1128-16AB-54F3-9A3922A0C310}"/>
+                <a16:creationId xmlns:a16="http://schemas.microsoft.com/office/drawing/2014/main" id="{9911C546-EB38-95BD-8F37-8DFF956B89C4}"/>
               </a:ext>
             </a:extLst>
           </p:cNvPr>
@@ -7065,8 +7065,8 @@
         </p:blipFill>
         <p:spPr>
           <a:xfrm>
-            <a:off x="0" y="774021"/>
-            <a:ext cx="9144000" cy="3738334"/>
+            <a:off x="1787142" y="499764"/>
+            <a:ext cx="5496692" cy="4286848"/>
           </a:xfrm>
           <a:prstGeom prst="rect">
             <a:avLst/>
